--- a/pm/SHP-Spine-Referral-Engine_Jul22.pptx
+++ b/pm/SHP-Spine-Referral-Engine_Jul22.pptx
@@ -5151,7 +5151,7 @@
                 <a:ea typeface="Calibri" pitchFamily="34" charset="-122"/>
                 <a:cs typeface="Calibri" pitchFamily="34" charset="-120"/>
               </a:rPr>
-              <a:t>3–3.5 spine days/wk: producers on 2-week cycles (achieved median: 2.0), one new prospect day weekly, Wave-2 sweeps every 3rd week.</a:t>
+              <a:t>3–3.5 spine days/wk on the Jul 22 cadence: Wave 1 biweekly, Tier 1 every 3 weeks, ortho every ~30 days (achieved medians exactly on spec), Wave-2 sweeps every 3rd week.</a:t>
             </a:r>
             <a:endParaRPr lang="en-US" sz="1150" dirty="0"/>
           </a:p>
